--- a/Ódor Artúr/érettségi/26maj/napozas.pptx
+++ b/Ódor Artúr/érettségi/26maj/napozas.pptx
@@ -104,6 +104,11 @@
       </a:defRPr>
     </a:lvl9pPr>
   </p:defaultTextStyle>
+  <p:extLst>
+    <p:ext uri="{EFAFB233-063F-42B5-8137-9DF3F51BA10A}">
+      <p15:sldGuideLst xmlns:p15="http://schemas.microsoft.com/office/powerpoint/2012/main"/>
+    </p:ext>
+  </p:extLst>
 </p:presentation>
 </file>
 
@@ -634,7 +639,7 @@
           <a:p>
             <a:fld id="{895D4B51-A0BF-4875-84DA-1569437CEAFA}" type="datetimeFigureOut">
               <a:rPr lang="hu-HU" smtClean="0"/>
-              <a:t>2026. 09. 19.</a:t>
+              <a:t>2026. 09. 21.</a:t>
             </a:fld>
             <a:endParaRPr lang="hu-HU"/>
           </a:p>
@@ -832,7 +837,7 @@
           <a:p>
             <a:fld id="{895D4B51-A0BF-4875-84DA-1569437CEAFA}" type="datetimeFigureOut">
               <a:rPr lang="hu-HU" smtClean="0"/>
-              <a:t>2026. 09. 19.</a:t>
+              <a:t>2026. 09. 21.</a:t>
             </a:fld>
             <a:endParaRPr lang="hu-HU"/>
           </a:p>
@@ -1040,7 +1045,7 @@
           <a:p>
             <a:fld id="{895D4B51-A0BF-4875-84DA-1569437CEAFA}" type="datetimeFigureOut">
               <a:rPr lang="hu-HU" smtClean="0"/>
-              <a:t>2026. 09. 19.</a:t>
+              <a:t>2026. 09. 21.</a:t>
             </a:fld>
             <a:endParaRPr lang="hu-HU"/>
           </a:p>
@@ -1238,7 +1243,7 @@
           <a:p>
             <a:fld id="{895D4B51-A0BF-4875-84DA-1569437CEAFA}" type="datetimeFigureOut">
               <a:rPr lang="hu-HU" smtClean="0"/>
-              <a:t>2026. 09. 19.</a:t>
+              <a:t>2026. 09. 21.</a:t>
             </a:fld>
             <a:endParaRPr lang="hu-HU"/>
           </a:p>
@@ -1513,7 +1518,7 @@
           <a:p>
             <a:fld id="{895D4B51-A0BF-4875-84DA-1569437CEAFA}" type="datetimeFigureOut">
               <a:rPr lang="hu-HU" smtClean="0"/>
-              <a:t>2026. 09. 19.</a:t>
+              <a:t>2026. 09. 21.</a:t>
             </a:fld>
             <a:endParaRPr lang="hu-HU"/>
           </a:p>
@@ -1778,7 +1783,7 @@
           <a:p>
             <a:fld id="{895D4B51-A0BF-4875-84DA-1569437CEAFA}" type="datetimeFigureOut">
               <a:rPr lang="hu-HU" smtClean="0"/>
-              <a:t>2026. 09. 19.</a:t>
+              <a:t>2026. 09. 21.</a:t>
             </a:fld>
             <a:endParaRPr lang="hu-HU"/>
           </a:p>
@@ -2190,7 +2195,7 @@
           <a:p>
             <a:fld id="{895D4B51-A0BF-4875-84DA-1569437CEAFA}" type="datetimeFigureOut">
               <a:rPr lang="hu-HU" smtClean="0"/>
-              <a:t>2026. 09. 19.</a:t>
+              <a:t>2026. 09. 21.</a:t>
             </a:fld>
             <a:endParaRPr lang="hu-HU"/>
           </a:p>
@@ -2331,7 +2336,7 @@
           <a:p>
             <a:fld id="{895D4B51-A0BF-4875-84DA-1569437CEAFA}" type="datetimeFigureOut">
               <a:rPr lang="hu-HU" smtClean="0"/>
-              <a:t>2026. 09. 19.</a:t>
+              <a:t>2026. 09. 21.</a:t>
             </a:fld>
             <a:endParaRPr lang="hu-HU"/>
           </a:p>
@@ -2444,7 +2449,7 @@
           <a:p>
             <a:fld id="{895D4B51-A0BF-4875-84DA-1569437CEAFA}" type="datetimeFigureOut">
               <a:rPr lang="hu-HU" smtClean="0"/>
-              <a:t>2026. 09. 19.</a:t>
+              <a:t>2026. 09. 21.</a:t>
             </a:fld>
             <a:endParaRPr lang="hu-HU"/>
           </a:p>
@@ -2755,7 +2760,7 @@
           <a:p>
             <a:fld id="{895D4B51-A0BF-4875-84DA-1569437CEAFA}" type="datetimeFigureOut">
               <a:rPr lang="hu-HU" smtClean="0"/>
-              <a:t>2026. 09. 19.</a:t>
+              <a:t>2026. 09. 21.</a:t>
             </a:fld>
             <a:endParaRPr lang="hu-HU"/>
           </a:p>
@@ -3043,7 +3048,7 @@
           <a:p>
             <a:fld id="{895D4B51-A0BF-4875-84DA-1569437CEAFA}" type="datetimeFigureOut">
               <a:rPr lang="hu-HU" smtClean="0"/>
-              <a:t>2026. 09. 19.</a:t>
+              <a:t>2026. 09. 21.</a:t>
             </a:fld>
             <a:endParaRPr lang="hu-HU"/>
           </a:p>
@@ -3284,7 +3289,7 @@
           <a:p>
             <a:fld id="{895D4B51-A0BF-4875-84DA-1569437CEAFA}" type="datetimeFigureOut">
               <a:rPr lang="hu-HU" smtClean="0"/>
-              <a:t>2026. 09. 19.</a:t>
+              <a:t>2026. 09. 21.</a:t>
             </a:fld>
             <a:endParaRPr lang="hu-HU"/>
           </a:p>
@@ -4762,7 +4767,7 @@
             </p:nvSpPr>
             <p:spPr>
               <a:xfrm>
-                <a:off x="5739321" y="620734"/>
+                <a:off x="5736607" y="620734"/>
                 <a:ext cx="998196" cy="1260000"/>
               </a:xfrm>
               <a:prstGeom prst="ellipse">
@@ -4972,7 +4977,7 @@
         <p:spPr>
           <a:xfrm>
             <a:off x="7137191" y="575733"/>
-            <a:ext cx="4583137" cy="1323439"/>
+            <a:ext cx="4833561" cy="1323439"/>
           </a:xfrm>
           <a:prstGeom prst="rect">
             <a:avLst/>
